--- a/slides/week10/ch10_dispatch.pptx
+++ b/slides/week10/ch10_dispatch.pptx
@@ -28,6 +28,7 @@
     <p:sldId id="276" r:id="rId27"/>
     <p:sldId id="277" r:id="rId28"/>
     <p:sldId id="278" r:id="rId29"/>
+    <p:sldId id="279" r:id="rId30"/>
   </p:sldIdLst>
   <p:notesMasterIdLst>
     <p:notesMasterId r:id="rId15"/>
@@ -593,7 +594,7 @@
           <a:lstStyle/>
           <a:p>
             <a:r>
-              <a:t>9장에서 확인한 속도와 정확도의 거래가 여기서 실제 결정으로 이어진다.</a:t>
+              <a:t>라우팅으로 정한 배차가 가장 나은 것은 채점 기준 자체가 라우팅 비용이라 당연하다.</a:t>
             </a:r>
           </a:p>
         </p:txBody>
@@ -663,7 +664,7 @@
           <a:lstStyle/>
           <a:p>
             <a:r>
-              <a:t>이 과목 이름의 물류 부분이 여기서 나온다. 수학이 같다는 점을 강조한다.</a:t>
+              <a:t>9장에서 확인한 속도와 정확도의 거래가 여기서 실제 결정으로 이어진다.</a:t>
             </a:r>
           </a:p>
         </p:txBody>
@@ -733,7 +734,7 @@
           <a:lstStyle/>
           <a:p>
             <a:r>
-              <a:t>2-opt는 경로가 스스로 교차하는 부분을 해소하는 효과가 있다. 차량이 여러 대이고 적재 한계가 있으면 차량경로 문제가 되고, 실무에서는 전용 솔버를 쓴다. 원리는 같다.</a:t>
+              <a:t>이 과목 이름의 물류 부분이 여기서 나온다. 수학이 같다는 점을 강조한다.</a:t>
             </a:r>
           </a:p>
         </p:txBody>
@@ -803,7 +804,7 @@
           <a:lstStyle/>
           <a:p>
             <a:r>
-              <a:t>나머지 네 단계를 11주차에 만든다. 그것으로 시뮬레이터가 완성된다.</a:t>
+              <a:t>2-opt는 경로가 스스로 교차하는 부분을 해소하는 효과가 있다. 차량이 여러 대이고 적재 한계가 있으면 차량경로 문제가 되고, 실무에서는 전용 솔버를 쓴다. 원리는 같다.</a:t>
             </a:r>
           </a:p>
         </p:txBody>
@@ -873,7 +874,7 @@
           <a:lstStyle/>
           <a:p>
             <a:r>
-              <a:t>같은 할당 문제가 물류 배정에 그대로 쓰이고, 여러 곳을 방문하는 문제는 외판원 문제와 차량경로 문제가 된다.</a:t>
+              <a:t>나머지 네 단계를 11주차에 만든다. 그것으로 시뮬레이터가 완성된다.</a:t>
             </a:r>
           </a:p>
         </p:txBody>
@@ -943,6 +944,76 @@
           <a:lstStyle/>
           <a:p>
             <a:r>
+              <a:t>같은 할당 문제가 물류 배정에 그대로 쓰이고, 여러 곳을 방문하는 문제는 외판원 문제와 차량경로 문제가 된다.</a:t>
+            </a:r>
+          </a:p>
+        </p:txBody>
+      </p:sp>
+      <p:sp>
+        <p:nvSpPr>
+          <p:cNvPr id="4" name="Slide Number Placeholder 3"/>
+          <p:cNvSpPr>
+            <a:spLocks noGrp="1"/>
+          </p:cNvSpPr>
+          <p:nvPr>
+            <p:ph type="sldNum" idx="5" sz="quarter"/>
+          </p:nvPr>
+        </p:nvSpPr>
+        <p:spPr/>
+      </p:sp>
+    </p:spTree>
+  </p:cSld>
+  <p:clrMapOvr>
+    <a:masterClrMapping/>
+  </p:clrMapOvr>
+</p:notes>
+</file>
+
+<file path=ppt/notesSlides/notesSlide16.xml><?xml version="1.0" encoding="utf-8"?>
+<p:notes xmlns:a="http://schemas.openxmlformats.org/drawingml/2006/main" xmlns:p="http://schemas.openxmlformats.org/presentationml/2006/main" xmlns:r="http://schemas.openxmlformats.org/officeDocument/2006/relationships">
+  <p:cSld>
+    <p:spTree>
+      <p:nvGrpSpPr>
+        <p:cNvPr id="1" name=""/>
+        <p:cNvGrpSpPr/>
+        <p:nvPr/>
+      </p:nvGrpSpPr>
+      <p:grpSpPr>
+        <a:xfrm>
+          <a:off x="0" y="0"/>
+          <a:ext cx="0" cy="0"/>
+          <a:chOff x="0" y="0"/>
+          <a:chExt cx="0" cy="0"/>
+        </a:xfrm>
+      </p:grpSpPr>
+      <p:sp>
+        <p:nvSpPr>
+          <p:cNvPr id="2" name="Slide Image Placeholder 1"/>
+          <p:cNvSpPr>
+            <a:spLocks noGrp="1"/>
+          </p:cNvSpPr>
+          <p:nvPr>
+            <p:ph type="sldImg" idx="2"/>
+          </p:nvPr>
+        </p:nvSpPr>
+        <p:spPr/>
+      </p:sp>
+      <p:sp>
+        <p:nvSpPr>
+          <p:cNvPr id="3" name="Notes Placeholder 2"/>
+          <p:cNvSpPr>
+            <a:spLocks noGrp="1"/>
+          </p:cNvSpPr>
+          <p:nvPr>
+            <p:ph type="body" idx="3" sz="quarter"/>
+          </p:nvPr>
+        </p:nvSpPr>
+        <p:spPr/>
+        <p:txBody>
+          <a:bodyPr/>
+          <a:lstStyle/>
+          <a:p>
+            <a:r>
               <a:t>연습 10.3의 두 목적은 총합 최소화와 다른 결과를 낸다. 기말 프로젝트에서 어떤 목적을 택할지와 연결되는 문제다.</a:t>
             </a:r>
           </a:p>
@@ -1153,7 +1224,7 @@
           <a:lstStyle/>
           <a:p>
             <a:r>
-              <a:t>문제를 표로 적으면 명확해진다. 이 표 하나가 이 장 전체의 대상이다.</a:t>
+              <a:t>슬라이드는 개요만 다룬다. 세부 내용과 코드는 교재 원고와 실습 노트북에서 확인한다. 교재 저장소는 비공개이므로 초대받은 계정으로 로그인한 상태여야 주소가 열린다.</a:t>
             </a:r>
           </a:p>
         </p:txBody>
@@ -1223,7 +1294,7 @@
           <a:lstStyle/>
           <a:p>
             <a:r>
-              <a:t>공정해 보이는 규칙이 전체로는 손해라는 점을 학생들이 직접 계산해 보게 한다.</a:t>
+              <a:t>문제를 표로 적으면 명확해진다. 이 표 하나가 이 장 전체의 대상이다.</a:t>
             </a:r>
           </a:p>
         </p:txBody>
@@ -1293,7 +1364,7 @@
           <a:lstStyle/>
           <a:p>
             <a:r>
-              <a:t>3장과 6장은 직접 구현했지만 여기서는 라이브러리를 쓴다. 무엇을 직접 짜고 무엇을 가져다 쓸지의 기준을 다시 언급한다.</a:t>
+              <a:t>공정해 보이는 규칙이 전체로는 손해라는 점을 학생들이 직접 계산해 보게 한다.</a:t>
             </a:r>
           </a:p>
         </p:txBody>
@@ -1363,7 +1434,7 @@
           <a:lstStyle/>
           <a:p>
             <a:r>
-              <a:t>이런 확인을 코드에 넣어 두면 회귀를 바로 잡을 수 있다.</a:t>
+              <a:t>3장과 6장은 직접 구현했지만 여기서는 라이브러리를 쓴다. 무엇을 직접 짜고 무엇을 가져다 쓸지의 기준을 다시 언급한다.</a:t>
             </a:r>
           </a:p>
         </p:txBody>
@@ -1433,7 +1504,7 @@
           <a:lstStyle/>
           <a:p>
             <a:r>
-              <a:t>승객이 수만 명이면 헝가리안도 느려진다. 그럴 때는 각 승객마다 가까운 차량 20대만 남겨 행렬을 줄인다. 실제 엔진의 후보 제한 인자가 이것이다.</a:t>
+              <a:t>이런 확인을 코드에 넣어 두면 회귀를 바로 잡을 수 있다.</a:t>
             </a:r>
           </a:p>
         </p:txBody>
@@ -1503,7 +1574,7 @@
           <a:lstStyle/>
           <a:p>
             <a:r>
-              <a:t>라우팅으로 정한 배차가 가장 나은 것은 채점 기준 자체가 라우팅 비용이라 당연하다.</a:t>
+              <a:t>승객이 수만 명이면 헝가리안도 느려진다. 그럴 때는 각 승객마다 가까운 차량 20대만 남겨 행렬을 줄인다. 실제 엔진의 후보 제한 인자가 이것이다.</a:t>
             </a:r>
           </a:p>
         </p:txBody>
@@ -5138,12 +5209,12 @@
       <p:grpSpPr/>
       <p:sp>
         <p:nvSpPr>
-          <p:cNvPr id="2" name="Text Placeholder 1"/>
-          <p:cNvSpPr>
-            <a:spLocks noGrp="1"/>
-          </p:cNvSpPr>
-          <p:nvPr>
-            <p:ph type="body" idx="100"/>
+          <p:cNvPr id="2" name="Title 1"/>
+          <p:cNvSpPr>
+            <a:spLocks noGrp="1"/>
+          </p:cNvSpPr>
+          <p:nvPr>
+            <p:ph type="title" idx="100"/>
           </p:nvPr>
         </p:nvSpPr>
         <p:spPr/>
@@ -5152,19 +5223,19 @@
           <a:lstStyle/>
           <a:p>
             <a:r>
-              <a:t>03</a:t>
-            </a:r>
-          </a:p>
-        </p:txBody>
-      </p:sp>
-      <p:sp>
-        <p:nvSpPr>
-          <p:cNvPr id="3" name="Title 2"/>
-          <p:cNvSpPr>
-            <a:spLocks noGrp="1"/>
-          </p:cNvSpPr>
-          <p:nvPr>
-            <p:ph type="title" idx="101"/>
+              <a:t>2.3 할당 문제</a:t>
+            </a:r>
+          </a:p>
+        </p:txBody>
+      </p:sp>
+      <p:sp>
+        <p:nvSpPr>
+          <p:cNvPr id="3" name="Text Placeholder 2"/>
+          <p:cNvSpPr>
+            <a:spLocks noGrp="1"/>
+          </p:cNvSpPr>
+          <p:nvPr>
+            <p:ph type="body" idx="101"/>
           </p:nvPr>
         </p:nvSpPr>
         <p:spPr/>
@@ -5173,7 +5244,7 @@
           <a:lstStyle/>
           <a:p>
             <a:r>
-              <a:t>교재 10.4–10.5 차이와 속도</a:t>
+              <a:t>2. 교재 10.1–10.3 비용행렬과 두 해법</a:t>
             </a:r>
           </a:p>
         </p:txBody>
@@ -5193,40 +5264,76 @@
           <a:bodyPr/>
           <a:lstStyle/>
           <a:p>
-            <a:pPr>
-              <a:spcAft>
-                <a:spcPts val="1000"/>
-              </a:spcAft>
-            </a:pPr>
-            <a:r>
-              <a:rPr>
+            <a:pPr/>
+            <a:r>
+              <a:t>전수 탐색은 승객 3명이면 6가지로 가능</a:t>
+            </a:r>
+          </a:p>
+          <a:p>
+            <a:pPr/>
+            <a:r>
+              <a:t>승객 20명이면 20 팩토리얼 — 약 243경 가지로 불가능</a:t>
+            </a:r>
+          </a:p>
+          <a:p>
+            <a:pPr/>
+            <a:r>
+              <a:t>이 문제의 이름은 할당 문제, 헝가리안 알고리즘으로 다항 시간에 해결</a:t>
+            </a:r>
+          </a:p>
+          <a:p>
+            <a:pPr/>
+            <a:r>
+              <a:t>구현은 scipy 제공 — 직접 작성하지 않음</a:t>
+            </a:r>
+          </a:p>
+        </p:txBody>
+      </p:sp>
+      <p:sp>
+        <p:nvSpPr>
+          <p:cNvPr id="25" name="Slide Number Placeholder 0"/>
+          <p:cNvSpPr>
+            <a:spLocks noGrp="1"/>
+          </p:cNvSpPr>
+          <p:nvPr>
+            <p:ph type="sldNum" sz="quarter" idx="4294967295"/>
+          </p:nvPr>
+        </p:nvSpPr>
+        <p:spPr>
+          <a:xfrm>
+            <a:off x="10591495" y="6355080"/>
+            <a:ext cx="914400" cy="274320"/>
+          </a:xfrm>
+          <a:prstGeom prst="rect">
+            <a:avLst/>
+          </a:prstGeom>
+          <a:extLst>
+            <a:ext uri="{C572A759-6A51-4108-AA02-DFA0A04FC94B}">
+              <ma14:wrappingTextBoxFlag xmlns:ma14="http://schemas.microsoft.com/office/mac/drawingml/2011/main" val="0"/>
+            </a:ext>
+          </a:extLst>
+        </p:spPr>
+        <p:txBody>
+          <a:bodyPr/>
+          <a:lstStyle>
+            <a:lvl1pPr>
+              <a:defRPr sz="1000">
                 <a:solidFill>
                   <a:srgbClr val="AFAFAF"/>
                 </a:solidFill>
-              </a:rPr>
-              <a:t>3.1  </a:t>
-            </a:r>
-            <a:r>
-              <a:t>두 방법의 차이</a:t>
-            </a:r>
-          </a:p>
-          <a:p>
-            <a:pPr>
-              <a:spcAft>
-                <a:spcPts val="1000"/>
-              </a:spcAft>
-            </a:pPr>
-            <a:r>
-              <a:rPr>
-                <a:solidFill>
-                  <a:srgbClr val="AFAFAF"/>
-                </a:solidFill>
-              </a:rPr>
-              <a:t>3.2  </a:t>
-            </a:r>
-            <a:r>
-              <a:t>최적해가 더 빠른 이유</a:t>
-            </a:r>
+                <a:latin typeface="Pretendard Medium"/>
+                <a:ea typeface="Pretendard Medium"/>
+                <a:cs typeface="Pretendard Medium"/>
+              </a:defRPr>
+            </a:lvl1pPr>
+          </a:lstStyle>
+          <a:p>
+            <a:pPr algn="r"/>
+            <a:fld id="{F7021451-1387-4CA6-816F-3879F97B5CBC}" type="slidenum">
+              <a:rPr b="0" lang="en-US"/>
+              <a:t>1004</a:t>
+            </a:fld>
+            <a:endParaRPr lang="en-US"/>
           </a:p>
         </p:txBody>
       </p:sp>
@@ -5250,6 +5357,118 @@
       <p:grpSpPr/>
       <p:sp>
         <p:nvSpPr>
+          <p:cNvPr id="2" name="Text Placeholder 1"/>
+          <p:cNvSpPr>
+            <a:spLocks noGrp="1"/>
+          </p:cNvSpPr>
+          <p:nvPr>
+            <p:ph type="body" idx="100"/>
+          </p:nvPr>
+        </p:nvSpPr>
+        <p:spPr/>
+        <p:txBody>
+          <a:bodyPr/>
+          <a:lstStyle/>
+          <a:p>
+            <a:r>
+              <a:t>03</a:t>
+            </a:r>
+          </a:p>
+        </p:txBody>
+      </p:sp>
+      <p:sp>
+        <p:nvSpPr>
+          <p:cNvPr id="3" name="Title 2"/>
+          <p:cNvSpPr>
+            <a:spLocks noGrp="1"/>
+          </p:cNvSpPr>
+          <p:nvPr>
+            <p:ph type="title" idx="101"/>
+          </p:nvPr>
+        </p:nvSpPr>
+        <p:spPr/>
+        <p:txBody>
+          <a:bodyPr/>
+          <a:lstStyle/>
+          <a:p>
+            <a:r>
+              <a:t>교재 10.4–10.5 차이와 속도</a:t>
+            </a:r>
+          </a:p>
+        </p:txBody>
+      </p:sp>
+      <p:sp>
+        <p:nvSpPr>
+          <p:cNvPr id="4" name="Text Placeholder 3"/>
+          <p:cNvSpPr>
+            <a:spLocks noGrp="1"/>
+          </p:cNvSpPr>
+          <p:nvPr>
+            <p:ph type="body" idx="102"/>
+          </p:nvPr>
+        </p:nvSpPr>
+        <p:spPr/>
+        <p:txBody>
+          <a:bodyPr/>
+          <a:lstStyle/>
+          <a:p>
+            <a:pPr>
+              <a:spcAft>
+                <a:spcPts val="1000"/>
+              </a:spcAft>
+            </a:pPr>
+            <a:r>
+              <a:rPr>
+                <a:solidFill>
+                  <a:srgbClr val="AFAFAF"/>
+                </a:solidFill>
+              </a:rPr>
+              <a:t>3.1  </a:t>
+            </a:r>
+            <a:r>
+              <a:t>두 방법의 차이</a:t>
+            </a:r>
+          </a:p>
+          <a:p>
+            <a:pPr>
+              <a:spcAft>
+                <a:spcPts val="1000"/>
+              </a:spcAft>
+            </a:pPr>
+            <a:r>
+              <a:rPr>
+                <a:solidFill>
+                  <a:srgbClr val="AFAFAF"/>
+                </a:solidFill>
+              </a:rPr>
+              <a:t>3.2  </a:t>
+            </a:r>
+            <a:r>
+              <a:t>최적해가 더 빠른 이유</a:t>
+            </a:r>
+          </a:p>
+        </p:txBody>
+      </p:sp>
+    </p:spTree>
+  </p:cSld>
+  <p:clrMapOvr>
+    <a:masterClrMapping/>
+  </p:clrMapOvr>
+</p:sld>
+</file>
+
+<file path=ppt/slides/slide12.xml><?xml version="1.0" encoding="utf-8"?>
+<p:sld xmlns:a="http://schemas.openxmlformats.org/drawingml/2006/main" xmlns:p="http://schemas.openxmlformats.org/presentationml/2006/main" xmlns:r="http://schemas.openxmlformats.org/officeDocument/2006/relationships">
+  <p:cSld>
+    <p:spTree>
+      <p:nvGrpSpPr>
+        <p:cNvPr id="1" name=""/>
+        <p:cNvGrpSpPr/>
+        <p:nvPr/>
+      </p:nvGrpSpPr>
+      <p:grpSpPr/>
+      <p:sp>
+        <p:nvSpPr>
           <p:cNvPr id="2" name="Title 1"/>
           <p:cNvSpPr>
             <a:spLocks noGrp="1"/>
@@ -5340,7 +5559,7 @@
           <a:lstStyle/>
           <a:p>
             <a:r>
-              <a:t>표 1. 무작위 200회 비교 결과 (승객 8명, 차량 10대)</a:t>
+              <a:t>표 2. 무작위 200회 비교 결과 (승객 8명, 차량 10대)</a:t>
             </a:r>
           </a:p>
         </p:txBody>
@@ -5719,7 +5938,7 @@
 </p:sld>
 </file>
 
-<file path=ppt/slides/slide12.xml><?xml version="1.0" encoding="utf-8"?>
+<file path=ppt/slides/slide13.xml><?xml version="1.0" encoding="utf-8"?>
 <p:sld xmlns:a="http://schemas.openxmlformats.org/drawingml/2006/main" xmlns:p="http://schemas.openxmlformats.org/presentationml/2006/main" xmlns:r="http://schemas.openxmlformats.org/officeDocument/2006/relationships">
   <p:cSld>
     <p:spTree>
@@ -5856,118 +6075,6 @@
               <a:t>1004</a:t>
             </a:fld>
             <a:endParaRPr lang="en-US"/>
-          </a:p>
-        </p:txBody>
-      </p:sp>
-    </p:spTree>
-  </p:cSld>
-  <p:clrMapOvr>
-    <a:masterClrMapping/>
-  </p:clrMapOvr>
-</p:sld>
-</file>
-
-<file path=ppt/slides/slide13.xml><?xml version="1.0" encoding="utf-8"?>
-<p:sld xmlns:a="http://schemas.openxmlformats.org/drawingml/2006/main" xmlns:p="http://schemas.openxmlformats.org/presentationml/2006/main" xmlns:r="http://schemas.openxmlformats.org/officeDocument/2006/relationships">
-  <p:cSld>
-    <p:spTree>
-      <p:nvGrpSpPr>
-        <p:cNvPr id="1" name=""/>
-        <p:cNvGrpSpPr/>
-        <p:nvPr/>
-      </p:nvGrpSpPr>
-      <p:grpSpPr/>
-      <p:sp>
-        <p:nvSpPr>
-          <p:cNvPr id="2" name="Text Placeholder 1"/>
-          <p:cNvSpPr>
-            <a:spLocks noGrp="1"/>
-          </p:cNvSpPr>
-          <p:nvPr>
-            <p:ph type="body" idx="100"/>
-          </p:nvPr>
-        </p:nvSpPr>
-        <p:spPr/>
-        <p:txBody>
-          <a:bodyPr/>
-          <a:lstStyle/>
-          <a:p>
-            <a:r>
-              <a:t>04</a:t>
-            </a:r>
-          </a:p>
-        </p:txBody>
-      </p:sp>
-      <p:sp>
-        <p:nvSpPr>
-          <p:cNvPr id="3" name="Title 2"/>
-          <p:cNvSpPr>
-            <a:spLocks noGrp="1"/>
-          </p:cNvSpPr>
-          <p:nvPr>
-            <p:ph type="title" idx="101"/>
-          </p:nvPr>
-        </p:nvSpPr>
-        <p:spPr/>
-        <p:txBody>
-          <a:bodyPr/>
-          <a:lstStyle/>
-          <a:p>
-            <a:r>
-              <a:t>교재 10.6 비용 정의</a:t>
-            </a:r>
-          </a:p>
-        </p:txBody>
-      </p:sp>
-      <p:sp>
-        <p:nvSpPr>
-          <p:cNvPr id="4" name="Text Placeholder 3"/>
-          <p:cNvSpPr>
-            <a:spLocks noGrp="1"/>
-          </p:cNvSpPr>
-          <p:nvPr>
-            <p:ph type="body" idx="102"/>
-          </p:nvPr>
-        </p:nvSpPr>
-        <p:spPr/>
-        <p:txBody>
-          <a:bodyPr/>
-          <a:lstStyle/>
-          <a:p>
-            <a:pPr>
-              <a:spcAft>
-                <a:spcPts val="1000"/>
-              </a:spcAft>
-            </a:pPr>
-            <a:r>
-              <a:rPr>
-                <a:solidFill>
-                  <a:srgbClr val="AFAFAF"/>
-                </a:solidFill>
-              </a:rPr>
-              <a:t>4.1  </a:t>
-            </a:r>
-            <a:r>
-              <a:t>세 가지 비용 산출 방법</a:t>
-            </a:r>
-          </a:p>
-          <a:p>
-            <a:pPr>
-              <a:spcAft>
-                <a:spcPts val="1000"/>
-              </a:spcAft>
-            </a:pPr>
-            <a:r>
-              <a:rPr>
-                <a:solidFill>
-                  <a:srgbClr val="AFAFAF"/>
-                </a:solidFill>
-              </a:rPr>
-              <a:t>4.2  </a:t>
-            </a:r>
-            <a:r>
-              <a:t>ETA 모델의 위치</a:t>
-            </a:r>
           </a:p>
         </p:txBody>
       </p:sp>
@@ -5991,6 +6098,118 @@
       <p:grpSpPr/>
       <p:sp>
         <p:nvSpPr>
+          <p:cNvPr id="2" name="Text Placeholder 1"/>
+          <p:cNvSpPr>
+            <a:spLocks noGrp="1"/>
+          </p:cNvSpPr>
+          <p:nvPr>
+            <p:ph type="body" idx="100"/>
+          </p:nvPr>
+        </p:nvSpPr>
+        <p:spPr/>
+        <p:txBody>
+          <a:bodyPr/>
+          <a:lstStyle/>
+          <a:p>
+            <a:r>
+              <a:t>04</a:t>
+            </a:r>
+          </a:p>
+        </p:txBody>
+      </p:sp>
+      <p:sp>
+        <p:nvSpPr>
+          <p:cNvPr id="3" name="Title 2"/>
+          <p:cNvSpPr>
+            <a:spLocks noGrp="1"/>
+          </p:cNvSpPr>
+          <p:nvPr>
+            <p:ph type="title" idx="101"/>
+          </p:nvPr>
+        </p:nvSpPr>
+        <p:spPr/>
+        <p:txBody>
+          <a:bodyPr/>
+          <a:lstStyle/>
+          <a:p>
+            <a:r>
+              <a:t>교재 10.6 비용 정의</a:t>
+            </a:r>
+          </a:p>
+        </p:txBody>
+      </p:sp>
+      <p:sp>
+        <p:nvSpPr>
+          <p:cNvPr id="4" name="Text Placeholder 3"/>
+          <p:cNvSpPr>
+            <a:spLocks noGrp="1"/>
+          </p:cNvSpPr>
+          <p:nvPr>
+            <p:ph type="body" idx="102"/>
+          </p:nvPr>
+        </p:nvSpPr>
+        <p:spPr/>
+        <p:txBody>
+          <a:bodyPr/>
+          <a:lstStyle/>
+          <a:p>
+            <a:pPr>
+              <a:spcAft>
+                <a:spcPts val="1000"/>
+              </a:spcAft>
+            </a:pPr>
+            <a:r>
+              <a:rPr>
+                <a:solidFill>
+                  <a:srgbClr val="AFAFAF"/>
+                </a:solidFill>
+              </a:rPr>
+              <a:t>4.1  </a:t>
+            </a:r>
+            <a:r>
+              <a:t>세 가지 비용 산출 방법</a:t>
+            </a:r>
+          </a:p>
+          <a:p>
+            <a:pPr>
+              <a:spcAft>
+                <a:spcPts val="1000"/>
+              </a:spcAft>
+            </a:pPr>
+            <a:r>
+              <a:rPr>
+                <a:solidFill>
+                  <a:srgbClr val="AFAFAF"/>
+                </a:solidFill>
+              </a:rPr>
+              <a:t>4.2  </a:t>
+            </a:r>
+            <a:r>
+              <a:t>ETA 모델의 위치</a:t>
+            </a:r>
+          </a:p>
+        </p:txBody>
+      </p:sp>
+    </p:spTree>
+  </p:cSld>
+  <p:clrMapOvr>
+    <a:masterClrMapping/>
+  </p:clrMapOvr>
+</p:sld>
+</file>
+
+<file path=ppt/slides/slide15.xml><?xml version="1.0" encoding="utf-8"?>
+<p:sld xmlns:a="http://schemas.openxmlformats.org/drawingml/2006/main" xmlns:p="http://schemas.openxmlformats.org/presentationml/2006/main" xmlns:r="http://schemas.openxmlformats.org/officeDocument/2006/relationships">
+  <p:cSld>
+    <p:spTree>
+      <p:nvGrpSpPr>
+        <p:cNvPr id="1" name=""/>
+        <p:cNvGrpSpPr/>
+        <p:nvPr/>
+      </p:nvGrpSpPr>
+      <p:grpSpPr/>
+      <p:sp>
+        <p:nvSpPr>
           <p:cNvPr id="2" name="Title 1"/>
           <p:cNvSpPr>
             <a:spLocks noGrp="1"/>
@@ -6075,7 +6294,7 @@
           <a:lstStyle/>
           <a:p>
             <a:r>
-              <a:t>표 2. 비용행렬을 채우는 세 가지 방법</a:t>
+              <a:t>표 3. 비용행렬을 채우는 세 가지 방법</a:t>
             </a:r>
           </a:p>
         </p:txBody>
@@ -6597,7 +6816,7 @@
 </p:sld>
 </file>
 
-<file path=ppt/slides/slide15.xml><?xml version="1.0" encoding="utf-8"?>
+<file path=ppt/slides/slide16.xml><?xml version="1.0" encoding="utf-8"?>
 <p:sld xmlns:a="http://schemas.openxmlformats.org/drawingml/2006/main" xmlns:p="http://schemas.openxmlformats.org/presentationml/2006/main" xmlns:r="http://schemas.openxmlformats.org/officeDocument/2006/relationships">
   <p:cSld>
     <p:spTree>
@@ -6734,118 +6953,6 @@
               <a:t>1004</a:t>
             </a:fld>
             <a:endParaRPr lang="en-US"/>
-          </a:p>
-        </p:txBody>
-      </p:sp>
-    </p:spTree>
-  </p:cSld>
-  <p:clrMapOvr>
-    <a:masterClrMapping/>
-  </p:clrMapOvr>
-</p:sld>
-</file>
-
-<file path=ppt/slides/slide16.xml><?xml version="1.0" encoding="utf-8"?>
-<p:sld xmlns:a="http://schemas.openxmlformats.org/drawingml/2006/main" xmlns:p="http://schemas.openxmlformats.org/presentationml/2006/main" xmlns:r="http://schemas.openxmlformats.org/officeDocument/2006/relationships">
-  <p:cSld>
-    <p:spTree>
-      <p:nvGrpSpPr>
-        <p:cNvPr id="1" name=""/>
-        <p:cNvGrpSpPr/>
-        <p:nvPr/>
-      </p:nvGrpSpPr>
-      <p:grpSpPr/>
-      <p:sp>
-        <p:nvSpPr>
-          <p:cNvPr id="2" name="Text Placeholder 1"/>
-          <p:cNvSpPr>
-            <a:spLocks noGrp="1"/>
-          </p:cNvSpPr>
-          <p:nvPr>
-            <p:ph type="body" idx="100"/>
-          </p:nvPr>
-        </p:nvSpPr>
-        <p:spPr/>
-        <p:txBody>
-          <a:bodyPr/>
-          <a:lstStyle/>
-          <a:p>
-            <a:r>
-              <a:t>05</a:t>
-            </a:r>
-          </a:p>
-        </p:txBody>
-      </p:sp>
-      <p:sp>
-        <p:nvSpPr>
-          <p:cNvPr id="3" name="Title 2"/>
-          <p:cNvSpPr>
-            <a:spLocks noGrp="1"/>
-          </p:cNvSpPr>
-          <p:nvPr>
-            <p:ph type="title" idx="101"/>
-          </p:nvPr>
-        </p:nvSpPr>
-        <p:spPr/>
-        <p:txBody>
-          <a:bodyPr/>
-          <a:lstStyle/>
-          <a:p>
-            <a:r>
-              <a:t>교재 10.7 물류로의 확장</a:t>
-            </a:r>
-          </a:p>
-        </p:txBody>
-      </p:sp>
-      <p:sp>
-        <p:nvSpPr>
-          <p:cNvPr id="4" name="Text Placeholder 3"/>
-          <p:cNvSpPr>
-            <a:spLocks noGrp="1"/>
-          </p:cNvSpPr>
-          <p:nvPr>
-            <p:ph type="body" idx="102"/>
-          </p:nvPr>
-        </p:nvSpPr>
-        <p:spPr/>
-        <p:txBody>
-          <a:bodyPr/>
-          <a:lstStyle/>
-          <a:p>
-            <a:pPr>
-              <a:spcAft>
-                <a:spcPts val="1000"/>
-              </a:spcAft>
-            </a:pPr>
-            <a:r>
-              <a:rPr>
-                <a:solidFill>
-                  <a:srgbClr val="AFAFAF"/>
-                </a:solidFill>
-              </a:rPr>
-              <a:t>5.1  </a:t>
-            </a:r>
-            <a:r>
-              <a:t>같은 할당 문제의 사례</a:t>
-            </a:r>
-          </a:p>
-          <a:p>
-            <a:pPr>
-              <a:spcAft>
-                <a:spcPts val="1000"/>
-              </a:spcAft>
-            </a:pPr>
-            <a:r>
-              <a:rPr>
-                <a:solidFill>
-                  <a:srgbClr val="AFAFAF"/>
-                </a:solidFill>
-              </a:rPr>
-              <a:t>5.2  </a:t>
-            </a:r>
-            <a:r>
-              <a:t>방문 순서 문제</a:t>
-            </a:r>
           </a:p>
         </p:txBody>
       </p:sp>
@@ -6869,6 +6976,118 @@
       <p:grpSpPr/>
       <p:sp>
         <p:nvSpPr>
+          <p:cNvPr id="2" name="Text Placeholder 1"/>
+          <p:cNvSpPr>
+            <a:spLocks noGrp="1"/>
+          </p:cNvSpPr>
+          <p:nvPr>
+            <p:ph type="body" idx="100"/>
+          </p:nvPr>
+        </p:nvSpPr>
+        <p:spPr/>
+        <p:txBody>
+          <a:bodyPr/>
+          <a:lstStyle/>
+          <a:p>
+            <a:r>
+              <a:t>05</a:t>
+            </a:r>
+          </a:p>
+        </p:txBody>
+      </p:sp>
+      <p:sp>
+        <p:nvSpPr>
+          <p:cNvPr id="3" name="Title 2"/>
+          <p:cNvSpPr>
+            <a:spLocks noGrp="1"/>
+          </p:cNvSpPr>
+          <p:nvPr>
+            <p:ph type="title" idx="101"/>
+          </p:nvPr>
+        </p:nvSpPr>
+        <p:spPr/>
+        <p:txBody>
+          <a:bodyPr/>
+          <a:lstStyle/>
+          <a:p>
+            <a:r>
+              <a:t>교재 10.7 물류로의 확장</a:t>
+            </a:r>
+          </a:p>
+        </p:txBody>
+      </p:sp>
+      <p:sp>
+        <p:nvSpPr>
+          <p:cNvPr id="4" name="Text Placeholder 3"/>
+          <p:cNvSpPr>
+            <a:spLocks noGrp="1"/>
+          </p:cNvSpPr>
+          <p:nvPr>
+            <p:ph type="body" idx="102"/>
+          </p:nvPr>
+        </p:nvSpPr>
+        <p:spPr/>
+        <p:txBody>
+          <a:bodyPr/>
+          <a:lstStyle/>
+          <a:p>
+            <a:pPr>
+              <a:spcAft>
+                <a:spcPts val="1000"/>
+              </a:spcAft>
+            </a:pPr>
+            <a:r>
+              <a:rPr>
+                <a:solidFill>
+                  <a:srgbClr val="AFAFAF"/>
+                </a:solidFill>
+              </a:rPr>
+              <a:t>5.1  </a:t>
+            </a:r>
+            <a:r>
+              <a:t>같은 할당 문제의 사례</a:t>
+            </a:r>
+          </a:p>
+          <a:p>
+            <a:pPr>
+              <a:spcAft>
+                <a:spcPts val="1000"/>
+              </a:spcAft>
+            </a:pPr>
+            <a:r>
+              <a:rPr>
+                <a:solidFill>
+                  <a:srgbClr val="AFAFAF"/>
+                </a:solidFill>
+              </a:rPr>
+              <a:t>5.2  </a:t>
+            </a:r>
+            <a:r>
+              <a:t>방문 순서 문제</a:t>
+            </a:r>
+          </a:p>
+        </p:txBody>
+      </p:sp>
+    </p:spTree>
+  </p:cSld>
+  <p:clrMapOvr>
+    <a:masterClrMapping/>
+  </p:clrMapOvr>
+</p:sld>
+</file>
+
+<file path=ppt/slides/slide18.xml><?xml version="1.0" encoding="utf-8"?>
+<p:sld xmlns:a="http://schemas.openxmlformats.org/drawingml/2006/main" xmlns:p="http://schemas.openxmlformats.org/presentationml/2006/main" xmlns:r="http://schemas.openxmlformats.org/officeDocument/2006/relationships">
+  <p:cSld>
+    <p:spTree>
+      <p:nvGrpSpPr>
+        <p:cNvPr id="1" name=""/>
+        <p:cNvGrpSpPr/>
+        <p:nvPr/>
+      </p:nvGrpSpPr>
+      <p:grpSpPr/>
+      <p:sp>
+        <p:nvSpPr>
           <p:cNvPr id="2" name="Title 1"/>
           <p:cNvSpPr>
             <a:spLocks noGrp="1"/>
@@ -7005,7 +7224,7 @@
 </p:sld>
 </file>
 
-<file path=ppt/slides/slide18.xml><?xml version="1.0" encoding="utf-8"?>
+<file path=ppt/slides/slide19.xml><?xml version="1.0" encoding="utf-8"?>
 <p:sld xmlns:a="http://schemas.openxmlformats.org/drawingml/2006/main" xmlns:p="http://schemas.openxmlformats.org/presentationml/2006/main" xmlns:r="http://schemas.openxmlformats.org/officeDocument/2006/relationships">
   <p:cSld>
     <p:spTree>
@@ -7190,136 +7409,6 @@
           </a:prstGeom>
         </p:spPr>
       </p:pic>
-    </p:spTree>
-  </p:cSld>
-  <p:clrMapOvr>
-    <a:masterClrMapping/>
-  </p:clrMapOvr>
-</p:sld>
-</file>
-
-<file path=ppt/slides/slide19.xml><?xml version="1.0" encoding="utf-8"?>
-<p:sld xmlns:a="http://schemas.openxmlformats.org/drawingml/2006/main" xmlns:p="http://schemas.openxmlformats.org/presentationml/2006/main" xmlns:r="http://schemas.openxmlformats.org/officeDocument/2006/relationships">
-  <p:cSld>
-    <p:spTree>
-      <p:nvGrpSpPr>
-        <p:cNvPr id="1" name=""/>
-        <p:cNvGrpSpPr/>
-        <p:nvPr/>
-      </p:nvGrpSpPr>
-      <p:grpSpPr/>
-      <p:sp>
-        <p:nvSpPr>
-          <p:cNvPr id="2" name="Text Placeholder 1"/>
-          <p:cNvSpPr>
-            <a:spLocks noGrp="1"/>
-          </p:cNvSpPr>
-          <p:nvPr>
-            <p:ph type="body" idx="100"/>
-          </p:nvPr>
-        </p:nvSpPr>
-        <p:spPr/>
-        <p:txBody>
-          <a:bodyPr/>
-          <a:lstStyle/>
-          <a:p>
-            <a:r>
-              <a:t>06</a:t>
-            </a:r>
-          </a:p>
-        </p:txBody>
-      </p:sp>
-      <p:sp>
-        <p:nvSpPr>
-          <p:cNvPr id="3" name="Title 2"/>
-          <p:cNvSpPr>
-            <a:spLocks noGrp="1"/>
-          </p:cNvSpPr>
-          <p:nvPr>
-            <p:ph type="title" idx="101"/>
-          </p:nvPr>
-        </p:nvSpPr>
-        <p:spPr/>
-        <p:txBody>
-          <a:bodyPr/>
-          <a:lstStyle/>
-          <a:p>
-            <a:r>
-              <a:t>교재 10.8 정리와 연습</a:t>
-            </a:r>
-          </a:p>
-        </p:txBody>
-      </p:sp>
-      <p:sp>
-        <p:nvSpPr>
-          <p:cNvPr id="4" name="Text Placeholder 3"/>
-          <p:cNvSpPr>
-            <a:spLocks noGrp="1"/>
-          </p:cNvSpPr>
-          <p:nvPr>
-            <p:ph type="body" idx="102"/>
-          </p:nvPr>
-        </p:nvSpPr>
-        <p:spPr/>
-        <p:txBody>
-          <a:bodyPr/>
-          <a:lstStyle/>
-          <a:p>
-            <a:pPr>
-              <a:spcAft>
-                <a:spcPts val="1000"/>
-              </a:spcAft>
-            </a:pPr>
-            <a:r>
-              <a:rPr>
-                <a:solidFill>
-                  <a:srgbClr val="AFAFAF"/>
-                </a:solidFill>
-              </a:rPr>
-              <a:t>6.1  </a:t>
-            </a:r>
-            <a:r>
-              <a:t>시뮬레이션 안에서의 위치</a:t>
-            </a:r>
-          </a:p>
-          <a:p>
-            <a:pPr>
-              <a:spcAft>
-                <a:spcPts val="1000"/>
-              </a:spcAft>
-            </a:pPr>
-            <a:r>
-              <a:rPr>
-                <a:solidFill>
-                  <a:srgbClr val="AFAFAF"/>
-                </a:solidFill>
-              </a:rPr>
-              <a:t>6.2  </a:t>
-            </a:r>
-            <a:r>
-              <a:t>오늘의 정리</a:t>
-            </a:r>
-          </a:p>
-          <a:p>
-            <a:pPr>
-              <a:spcAft>
-                <a:spcPts val="1000"/>
-              </a:spcAft>
-            </a:pPr>
-            <a:r>
-              <a:rPr>
-                <a:solidFill>
-                  <a:srgbClr val="AFAFAF"/>
-                </a:solidFill>
-              </a:rPr>
-              <a:t>6.3  </a:t>
-            </a:r>
-            <a:r>
-              <a:t>연습과 다음 장</a:t>
-            </a:r>
-          </a:p>
-        </p:txBody>
-      </p:sp>
     </p:spTree>
   </p:cSld>
   <p:clrMapOvr>
@@ -7488,7 +7577,7 @@
                           </a:solidFill>
                           <a:latin typeface="Pretendard Medium"/>
                         </a:rPr>
-                        <a:t>1.1 최근접 차량이 겹칠 때  ·  1.2 학습 목표</a:t>
+                        <a:t>1.1 최근접 차량이 겹칠 때  ·  1.2 학습 목표  ·  1.3 교재와 실습을 여는 곳</a:t>
                       </a:r>
                     </a:p>
                   </a:txBody>
@@ -8135,12 +8224,12 @@
       <p:grpSpPr/>
       <p:sp>
         <p:nvSpPr>
-          <p:cNvPr id="2" name="Title 1"/>
-          <p:cNvSpPr>
-            <a:spLocks noGrp="1"/>
-          </p:cNvSpPr>
-          <p:nvPr>
-            <p:ph type="title" idx="100"/>
+          <p:cNvPr id="2" name="Text Placeholder 1"/>
+          <p:cNvSpPr>
+            <a:spLocks noGrp="1"/>
+          </p:cNvSpPr>
+          <p:nvPr>
+            <p:ph type="body" idx="100"/>
           </p:nvPr>
         </p:nvSpPr>
         <p:spPr/>
@@ -8149,19 +8238,19 @@
           <a:lstStyle/>
           <a:p>
             <a:r>
-              <a:t>6.1 시뮬레이션 안에서의 위치</a:t>
-            </a:r>
-          </a:p>
-        </p:txBody>
-      </p:sp>
-      <p:sp>
-        <p:nvSpPr>
-          <p:cNvPr id="3" name="Text Placeholder 2"/>
-          <p:cNvSpPr>
-            <a:spLocks noGrp="1"/>
-          </p:cNvSpPr>
-          <p:nvPr>
-            <p:ph type="body" idx="101"/>
+              <a:t>06</a:t>
+            </a:r>
+          </a:p>
+        </p:txBody>
+      </p:sp>
+      <p:sp>
+        <p:nvSpPr>
+          <p:cNvPr id="3" name="Title 2"/>
+          <p:cNvSpPr>
+            <a:spLocks noGrp="1"/>
+          </p:cNvSpPr>
+          <p:nvPr>
+            <p:ph type="title" idx="101"/>
           </p:nvPr>
         </p:nvSpPr>
         <p:spPr/>
@@ -8170,7 +8259,7 @@
           <a:lstStyle/>
           <a:p>
             <a:r>
-              <a:t>6. 교재 10.8 정리와 연습</a:t>
+              <a:t>교재 10.8 정리와 연습</a:t>
             </a:r>
           </a:p>
         </p:txBody>
@@ -8190,94 +8279,58 @@
           <a:bodyPr/>
           <a:lstStyle/>
           <a:p>
-            <a:pPr/>
-            <a:r>
-              <a:t>지금까지 만든 것은 한 순간의 배차</a:t>
-            </a:r>
-          </a:p>
-          <a:p>
-            <a:pPr/>
-            <a:r>
-              <a:t>시뮬레이션은 이것을 1분마다 반복</a:t>
-            </a:r>
-          </a:p>
-          <a:p>
-            <a:pPr/>
-            <a:r>
-              <a:t>매 분의 절차</a:t>
-            </a:r>
-          </a:p>
-          <a:p>
-            <a:pPr lvl="1"/>
-            <a:r>
-              <a:t>도착한 호출을 대기 목록에 추가, 도착한 차량을 빈 차 목록으로 이동</a:t>
-            </a:r>
-          </a:p>
-          <a:p>
-            <a:pPr lvl="1"/>
-            <a:r>
-              <a:t>대기 승객과 빈 차가 모두 있으면 비용행렬 생성 후 배차</a:t>
-            </a:r>
-          </a:p>
-          <a:p>
-            <a:pPr lvl="1"/>
-            <a:r>
-              <a:t>배차된 차량을 승객 쪽으로 이동시키고 기록 저장</a:t>
-            </a:r>
-          </a:p>
-          <a:p>
-            <a:pPr/>
-            <a:r>
-              <a:t>이 중 배차 단계가 오늘 만든 것</a:t>
-            </a:r>
-          </a:p>
-        </p:txBody>
-      </p:sp>
-      <p:sp>
-        <p:nvSpPr>
-          <p:cNvPr id="25" name="Slide Number Placeholder 0"/>
-          <p:cNvSpPr>
-            <a:spLocks noGrp="1"/>
-          </p:cNvSpPr>
-          <p:nvPr>
-            <p:ph type="sldNum" sz="quarter" idx="4294967295"/>
-          </p:nvPr>
-        </p:nvSpPr>
-        <p:spPr>
-          <a:xfrm>
-            <a:off x="10591495" y="6355080"/>
-            <a:ext cx="914400" cy="274320"/>
-          </a:xfrm>
-          <a:prstGeom prst="rect">
-            <a:avLst/>
-          </a:prstGeom>
-          <a:extLst>
-            <a:ext uri="{C572A759-6A51-4108-AA02-DFA0A04FC94B}">
-              <ma14:wrappingTextBoxFlag xmlns:ma14="http://schemas.microsoft.com/office/mac/drawingml/2011/main" val="0"/>
-            </a:ext>
-          </a:extLst>
-        </p:spPr>
-        <p:txBody>
-          <a:bodyPr/>
-          <a:lstStyle>
-            <a:lvl1pPr>
-              <a:defRPr sz="1000">
+            <a:pPr>
+              <a:spcAft>
+                <a:spcPts val="1000"/>
+              </a:spcAft>
+            </a:pPr>
+            <a:r>
+              <a:rPr>
                 <a:solidFill>
                   <a:srgbClr val="AFAFAF"/>
                 </a:solidFill>
-                <a:latin typeface="Pretendard Medium"/>
-                <a:ea typeface="Pretendard Medium"/>
-                <a:cs typeface="Pretendard Medium"/>
-              </a:defRPr>
-            </a:lvl1pPr>
-          </a:lstStyle>
-          <a:p>
-            <a:pPr algn="r"/>
-            <a:fld id="{F7021451-1387-4CA6-816F-3879F97B5CBC}" type="slidenum">
-              <a:rPr b="0" lang="en-US"/>
-              <a:t>1004</a:t>
-            </a:fld>
-            <a:endParaRPr lang="en-US"/>
+              </a:rPr>
+              <a:t>6.1  </a:t>
+            </a:r>
+            <a:r>
+              <a:t>시뮬레이션 안에서의 위치</a:t>
+            </a:r>
+          </a:p>
+          <a:p>
+            <a:pPr>
+              <a:spcAft>
+                <a:spcPts val="1000"/>
+              </a:spcAft>
+            </a:pPr>
+            <a:r>
+              <a:rPr>
+                <a:solidFill>
+                  <a:srgbClr val="AFAFAF"/>
+                </a:solidFill>
+              </a:rPr>
+              <a:t>6.2  </a:t>
+            </a:r>
+            <a:r>
+              <a:t>오늘의 정리</a:t>
+            </a:r>
+          </a:p>
+          <a:p>
+            <a:pPr>
+              <a:spcAft>
+                <a:spcPts val="1000"/>
+              </a:spcAft>
+            </a:pPr>
+            <a:r>
+              <a:rPr>
+                <a:solidFill>
+                  <a:srgbClr val="AFAFAF"/>
+                </a:solidFill>
+              </a:rPr>
+              <a:t>6.3  </a:t>
+            </a:r>
+            <a:r>
+              <a:t>연습과 다음 장</a:t>
+            </a:r>
           </a:p>
         </p:txBody>
       </p:sp>
@@ -8315,7 +8368,7 @@
           <a:lstStyle/>
           <a:p>
             <a:r>
-              <a:t>6.2 오늘의 정리</a:t>
+              <a:t>6.1 시뮬레이션 안에서의 위치</a:t>
             </a:r>
           </a:p>
         </p:txBody>
@@ -8358,25 +8411,43 @@
           <a:p>
             <a:pPr/>
             <a:r>
-              <a:t>배차는 비용행렬 문제 — 행은 승객, 열은 차량, 칸은 도착 예상시간</a:t>
+              <a:t>지금까지 만든 것은 한 순간의 배차</a:t>
             </a:r>
           </a:p>
           <a:p>
             <a:pPr/>
             <a:r>
-              <a:t>할당 문제로 풀면 총 대기시간이 평균 14%, 최대 79% 감소</a:t>
+              <a:t>시뮬레이션은 이것을 1분마다 반복</a:t>
             </a:r>
           </a:p>
           <a:p>
             <a:pPr/>
             <a:r>
-              <a:t>헝가리안은 C 구현이라 파이썬 탐욕보다 오히려 빠름</a:t>
+              <a:t>매 분의 절차</a:t>
+            </a:r>
+          </a:p>
+          <a:p>
+            <a:pPr lvl="1"/>
+            <a:r>
+              <a:t>도착한 호출을 대기 목록에 추가, 도착한 차량을 빈 차 목록으로 이동</a:t>
+            </a:r>
+          </a:p>
+          <a:p>
+            <a:pPr lvl="1"/>
+            <a:r>
+              <a:t>대기 승객과 빈 차가 모두 있으면 비용행렬 생성 후 배차</a:t>
+            </a:r>
+          </a:p>
+          <a:p>
+            <a:pPr lvl="1"/>
+            <a:r>
+              <a:t>배차된 차량을 승객 쪽으로 이동시키고 기록 저장</a:t>
             </a:r>
           </a:p>
           <a:p>
             <a:pPr/>
             <a:r>
-              <a:t>비용을 무엇으로 재느냐가 결정을 바꿈 — 직선거리는 지형을 반영하지 못함</a:t>
+              <a:t>이 중 배차 단계가 오늘 만든 것</a:t>
             </a:r>
           </a:p>
         </p:txBody>
@@ -8463,7 +8534,7 @@
           <a:lstStyle/>
           <a:p>
             <a:r>
-              <a:t>6.3 연습과 다음 장</a:t>
+              <a:t>6.2 오늘의 정리</a:t>
             </a:r>
           </a:p>
         </p:txBody>
@@ -8506,37 +8577,25 @@
           <a:p>
             <a:pPr/>
             <a:r>
-              <a:t>연습 10.1 ★ — 탐욕 배차의 처리 순서를 바꿨을 때의 총 대기시간</a:t>
-            </a:r>
-          </a:p>
-          <a:p>
-            <a:pPr lvl="1"/>
-            <a:r>
-              <a:t>산출물: 세 가지 순서의 비교, 우열과 이유</a:t>
+              <a:t>배차는 비용행렬 문제 — 행은 승객, 열은 차량, 칸은 도착 예상시간</a:t>
             </a:r>
           </a:p>
           <a:p>
             <a:pPr/>
             <a:r>
-              <a:t>연습 10.2 ★★ — 후보를 k대로 제한하는 가지치기 구현</a:t>
-            </a:r>
-          </a:p>
-          <a:p>
-            <a:pPr lvl="1"/>
-            <a:r>
-              <a:t>산출물: k별 총 대기시간, 계산 시간, 미배차 인원 표와 적정 k 근거 3줄</a:t>
+              <a:t>할당 문제로 풀면 총 대기시간이 평균 14%, 최대 79% 감소</a:t>
             </a:r>
           </a:p>
           <a:p>
             <a:pPr/>
             <a:r>
-              <a:t>연습 10.3 ★★★ — 최대 대기 최소화와 10분 초과 인원 최소화</a:t>
+              <a:t>헝가리안은 C 구현이라 파이썬 탐욕보다 오히려 빠름</a:t>
             </a:r>
           </a:p>
           <a:p>
             <a:pPr/>
             <a:r>
-              <a:t>다음 장: 11장 시뮬레이션 루프 직접 구현</a:t>
+              <a:t>비용을 무엇으로 재느냐가 결정을 바꿈 — 직선거리는 지형을 반영하지 못함</a:t>
             </a:r>
           </a:p>
         </p:txBody>
@@ -8623,6 +8682,166 @@
           <a:lstStyle/>
           <a:p>
             <a:r>
+              <a:t>6.3 연습과 다음 장</a:t>
+            </a:r>
+          </a:p>
+        </p:txBody>
+      </p:sp>
+      <p:sp>
+        <p:nvSpPr>
+          <p:cNvPr id="3" name="Text Placeholder 2"/>
+          <p:cNvSpPr>
+            <a:spLocks noGrp="1"/>
+          </p:cNvSpPr>
+          <p:nvPr>
+            <p:ph type="body" idx="101"/>
+          </p:nvPr>
+        </p:nvSpPr>
+        <p:spPr/>
+        <p:txBody>
+          <a:bodyPr/>
+          <a:lstStyle/>
+          <a:p>
+            <a:r>
+              <a:t>6. 교재 10.8 정리와 연습</a:t>
+            </a:r>
+          </a:p>
+        </p:txBody>
+      </p:sp>
+      <p:sp>
+        <p:nvSpPr>
+          <p:cNvPr id="4" name="Text Placeholder 3"/>
+          <p:cNvSpPr>
+            <a:spLocks noGrp="1"/>
+          </p:cNvSpPr>
+          <p:nvPr>
+            <p:ph type="body" idx="102"/>
+          </p:nvPr>
+        </p:nvSpPr>
+        <p:spPr/>
+        <p:txBody>
+          <a:bodyPr/>
+          <a:lstStyle/>
+          <a:p>
+            <a:pPr/>
+            <a:r>
+              <a:t>연습 10.1 ★ — 탐욕 배차의 처리 순서를 바꿨을 때의 총 대기시간</a:t>
+            </a:r>
+          </a:p>
+          <a:p>
+            <a:pPr lvl="1"/>
+            <a:r>
+              <a:t>산출물: 세 가지 순서의 비교, 우열과 이유</a:t>
+            </a:r>
+          </a:p>
+          <a:p>
+            <a:pPr/>
+            <a:r>
+              <a:t>연습 10.2 ★★ — 후보를 k대로 제한하는 가지치기 구현</a:t>
+            </a:r>
+          </a:p>
+          <a:p>
+            <a:pPr lvl="1"/>
+            <a:r>
+              <a:t>산출물: k별 총 대기시간, 계산 시간, 미배차 인원 표와 적정 k 근거 3줄</a:t>
+            </a:r>
+          </a:p>
+          <a:p>
+            <a:pPr/>
+            <a:r>
+              <a:t>연습 10.3 ★★★ — 최대 대기 최소화와 10분 초과 인원 최소화</a:t>
+            </a:r>
+          </a:p>
+          <a:p>
+            <a:pPr/>
+            <a:r>
+              <a:t>다음 장: 11장 시뮬레이션 루프 직접 구현</a:t>
+            </a:r>
+          </a:p>
+        </p:txBody>
+      </p:sp>
+      <p:sp>
+        <p:nvSpPr>
+          <p:cNvPr id="25" name="Slide Number Placeholder 0"/>
+          <p:cNvSpPr>
+            <a:spLocks noGrp="1"/>
+          </p:cNvSpPr>
+          <p:nvPr>
+            <p:ph type="sldNum" sz="quarter" idx="4294967295"/>
+          </p:nvPr>
+        </p:nvSpPr>
+        <p:spPr>
+          <a:xfrm>
+            <a:off x="10591495" y="6355080"/>
+            <a:ext cx="914400" cy="274320"/>
+          </a:xfrm>
+          <a:prstGeom prst="rect">
+            <a:avLst/>
+          </a:prstGeom>
+          <a:extLst>
+            <a:ext uri="{C572A759-6A51-4108-AA02-DFA0A04FC94B}">
+              <ma14:wrappingTextBoxFlag xmlns:ma14="http://schemas.microsoft.com/office/mac/drawingml/2011/main" val="0"/>
+            </a:ext>
+          </a:extLst>
+        </p:spPr>
+        <p:txBody>
+          <a:bodyPr/>
+          <a:lstStyle>
+            <a:lvl1pPr>
+              <a:defRPr sz="1000">
+                <a:solidFill>
+                  <a:srgbClr val="AFAFAF"/>
+                </a:solidFill>
+                <a:latin typeface="Pretendard Medium"/>
+                <a:ea typeface="Pretendard Medium"/>
+                <a:cs typeface="Pretendard Medium"/>
+              </a:defRPr>
+            </a:lvl1pPr>
+          </a:lstStyle>
+          <a:p>
+            <a:pPr algn="r"/>
+            <a:fld id="{F7021451-1387-4CA6-816F-3879F97B5CBC}" type="slidenum">
+              <a:rPr b="0" lang="en-US"/>
+              <a:t>1004</a:t>
+            </a:fld>
+            <a:endParaRPr lang="en-US"/>
+          </a:p>
+        </p:txBody>
+      </p:sp>
+    </p:spTree>
+  </p:cSld>
+  <p:clrMapOvr>
+    <a:masterClrMapping/>
+  </p:clrMapOvr>
+</p:sld>
+</file>
+
+<file path=ppt/slides/slide24.xml><?xml version="1.0" encoding="utf-8"?>
+<p:sld xmlns:a="http://schemas.openxmlformats.org/drawingml/2006/main" xmlns:p="http://schemas.openxmlformats.org/presentationml/2006/main" xmlns:r="http://schemas.openxmlformats.org/officeDocument/2006/relationships">
+  <p:cSld>
+    <p:spTree>
+      <p:nvGrpSpPr>
+        <p:cNvPr id="1" name=""/>
+        <p:cNvGrpSpPr/>
+        <p:nvPr/>
+      </p:nvGrpSpPr>
+      <p:grpSpPr/>
+      <p:sp>
+        <p:nvSpPr>
+          <p:cNvPr id="2" name="Title 1"/>
+          <p:cNvSpPr>
+            <a:spLocks noGrp="1"/>
+          </p:cNvSpPr>
+          <p:nvPr>
+            <p:ph type="title" idx="100"/>
+          </p:nvPr>
+        </p:nvSpPr>
+        <p:spPr/>
+        <p:txBody>
+          <a:bodyPr/>
+          <a:lstStyle/>
+          <a:p>
+            <a:r>
               <a:t>다음 주에 봅니다</a:t>
             </a:r>
           </a:p>
@@ -8780,6 +8999,24 @@
               <a:t>학습 목표</a:t>
             </a:r>
           </a:p>
+          <a:p>
+            <a:pPr>
+              <a:spcAft>
+                <a:spcPts val="1000"/>
+              </a:spcAft>
+            </a:pPr>
+            <a:r>
+              <a:rPr>
+                <a:solidFill>
+                  <a:srgbClr val="AFAFAF"/>
+                </a:solidFill>
+              </a:rPr>
+              <a:t>1.3  </a:t>
+            </a:r>
+            <a:r>
+              <a:t>교재와 실습을 여는 곳</a:t>
+            </a:r>
+          </a:p>
         </p:txBody>
       </p:sp>
     </p:spTree>
@@ -9098,12 +9335,12 @@
       <p:grpSpPr/>
       <p:sp>
         <p:nvSpPr>
-          <p:cNvPr id="2" name="Text Placeholder 1"/>
-          <p:cNvSpPr>
-            <a:spLocks noGrp="1"/>
-          </p:cNvSpPr>
-          <p:nvPr>
-            <p:ph type="body" idx="100"/>
+          <p:cNvPr id="2" name="Title 1"/>
+          <p:cNvSpPr>
+            <a:spLocks noGrp="1"/>
+          </p:cNvSpPr>
+          <p:nvPr>
+            <p:ph type="title" idx="100"/>
           </p:nvPr>
         </p:nvSpPr>
         <p:spPr/>
@@ -9112,19 +9349,19 @@
           <a:lstStyle/>
           <a:p>
             <a:r>
-              <a:t>02</a:t>
-            </a:r>
-          </a:p>
-        </p:txBody>
-      </p:sp>
-      <p:sp>
-        <p:nvSpPr>
-          <p:cNvPr id="3" name="Title 2"/>
-          <p:cNvSpPr>
-            <a:spLocks noGrp="1"/>
-          </p:cNvSpPr>
-          <p:nvPr>
-            <p:ph type="title" idx="101"/>
+              <a:t>1.3 교재와 실습을 여는 곳</a:t>
+            </a:r>
+          </a:p>
+        </p:txBody>
+      </p:sp>
+      <p:sp>
+        <p:nvSpPr>
+          <p:cNvPr id="3" name="Text Placeholder 2"/>
+          <p:cNvSpPr>
+            <a:spLocks noGrp="1"/>
+          </p:cNvSpPr>
+          <p:nvPr>
+            <p:ph type="body" idx="101"/>
           </p:nvPr>
         </p:nvSpPr>
         <p:spPr/>
@@ -9133,7 +9370,7 @@
           <a:lstStyle/>
           <a:p>
             <a:r>
-              <a:t>교재 10.1–10.3 비용행렬과 두 해법</a:t>
+              <a:t>1. 도입과 학습 목표</a:t>
             </a:r>
           </a:p>
         </p:txBody>
@@ -9153,58 +9390,335 @@
           <a:bodyPr/>
           <a:lstStyle/>
           <a:p>
-            <a:pPr>
-              <a:spcAft>
-                <a:spcPts val="1000"/>
-              </a:spcAft>
-            </a:pPr>
-            <a:r>
-              <a:rPr>
+            <a:pPr/>
+            <a:r>
+              <a:t>저장소: github.com/jihoyeo/mobility-simulation-book — blob/main 아래 경로</a:t>
+            </a:r>
+          </a:p>
+          <a:p>
+            <a:pPr/>
+            <a:r>
+              <a:t>노트북 실행: jupyter lab labs/ch10_dispatch.ipynb</a:t>
+            </a:r>
+          </a:p>
+          <a:p>
+            <a:pPr/>
+            <a:r>
+              <a:t>진행 순서: 슬라이드 개요 → 교재 본문 → 실습 노트북</a:t>
+            </a:r>
+          </a:p>
+        </p:txBody>
+      </p:sp>
+      <p:sp>
+        <p:nvSpPr>
+          <p:cNvPr id="5" name="Text Placeholder 4"/>
+          <p:cNvSpPr>
+            <a:spLocks noGrp="1"/>
+          </p:cNvSpPr>
+          <p:nvPr>
+            <p:ph type="body" idx="103"/>
+          </p:nvPr>
+        </p:nvSpPr>
+        <p:spPr/>
+        <p:txBody>
+          <a:bodyPr/>
+          <a:lstStyle/>
+          <a:p>
+            <a:r>
+              <a:t>표 1. 오늘 여는 파일과 경로</a:t>
+            </a:r>
+          </a:p>
+        </p:txBody>
+      </p:sp>
+      <p:graphicFrame>
+        <p:nvGraphicFramePr>
+          <p:cNvPr id="6" name="Table Placeholder 5"/>
+          <p:cNvGraphicFramePr>
+            <a:graphicFrameLocks noGrp="1"/>
+          </p:cNvGraphicFramePr>
+          <p:nvPr>
+            <p:ph type="tbl" idx="104"/>
+          </p:nvPr>
+        </p:nvGraphicFramePr>
+        <p:xfrm>
+          <a:off x="4937760" y="1828800"/>
+          <a:ext cx="6565392" cy="1676400"/>
+        </p:xfrm>
+        <a:graphic>
+          <a:graphicData uri="http://schemas.openxmlformats.org/drawingml/2006/table">
+            <a:tbl>
+              <a:tblPr firstRow="0" bandRow="0" firstCol="0" lastRow="0" lastCol="0" bandCol="0"/>
+              <a:tblGrid>
+                <a:gridCol w="3282696"/>
+                <a:gridCol w="3282696"/>
+              </a:tblGrid>
+              <a:tr h="406400">
+                <a:tc>
+                  <a:txBody>
+                    <a:bodyPr/>
+                    <a:lstStyle/>
+                    <a:p>
+                      <a:r>
+                        <a:rPr sz="1300" b="0">
+                          <a:solidFill>
+                            <a:srgbClr val="FFFFFF"/>
+                          </a:solidFill>
+                          <a:latin typeface="Pretendard Medium"/>
+                        </a:rPr>
+                        <a:t>자료</a:t>
+                      </a:r>
+                    </a:p>
+                  </a:txBody>
+                  <a:tcPr marL="101600" marR="101600" marT="76200" marB="76200" anchor="ctr">
+                    <a:solidFill>
+                      <a:srgbClr val="000000"/>
+                    </a:solidFill>
+                    <a:lnL w="0">
+                      <a:noFill/>
+                    </a:lnL>
+                    <a:lnR w="0">
+                      <a:noFill/>
+                    </a:lnR>
+                    <a:lnT w="0">
+                      <a:noFill/>
+                    </a:lnT>
+                    <a:lnB w="0">
+                      <a:noFill/>
+                    </a:lnB>
+                  </a:tcPr>
+                </a:tc>
+                <a:tc>
+                  <a:txBody>
+                    <a:bodyPr/>
+                    <a:lstStyle/>
+                    <a:p>
+                      <a:r>
+                        <a:rPr sz="1300" b="0">
+                          <a:solidFill>
+                            <a:srgbClr val="FFFFFF"/>
+                          </a:solidFill>
+                          <a:latin typeface="Pretendard Medium"/>
+                        </a:rPr>
+                        <a:t>경로</a:t>
+                      </a:r>
+                    </a:p>
+                  </a:txBody>
+                  <a:tcPr marL="101600" marR="101600" marT="76200" marB="76200" anchor="ctr">
+                    <a:solidFill>
+                      <a:srgbClr val="000000"/>
+                    </a:solidFill>
+                    <a:lnL w="0">
+                      <a:noFill/>
+                    </a:lnL>
+                    <a:lnR w="0">
+                      <a:noFill/>
+                    </a:lnR>
+                    <a:lnT w="0">
+                      <a:noFill/>
+                    </a:lnT>
+                    <a:lnB w="0">
+                      <a:noFill/>
+                    </a:lnB>
+                  </a:tcPr>
+                </a:tc>
+              </a:tr>
+              <a:tr h="635000">
+                <a:tc>
+                  <a:txBody>
+                    <a:bodyPr/>
+                    <a:lstStyle/>
+                    <a:p>
+                      <a:r>
+                        <a:rPr sz="1300" b="1">
+                          <a:solidFill>
+                            <a:srgbClr val="000000"/>
+                          </a:solidFill>
+                          <a:latin typeface="Pretendard"/>
+                        </a:rPr>
+                        <a:t>교재 원고</a:t>
+                      </a:r>
+                    </a:p>
+                  </a:txBody>
+                  <a:tcPr marL="101600" marR="101600" marT="101600" marB="101600" anchor="ctr">
+                    <a:solidFill>
+                      <a:srgbClr val="FFFFFF"/>
+                    </a:solidFill>
+                    <a:lnL w="0">
+                      <a:noFill/>
+                    </a:lnL>
+                    <a:lnR w="0">
+                      <a:noFill/>
+                    </a:lnR>
+                    <a:lnT w="0">
+                      <a:noFill/>
+                    </a:lnT>
+                    <a:lnB w="9525">
+                      <a:solidFill>
+                        <a:srgbClr val="E2E2E2"/>
+                      </a:solidFill>
+                    </a:lnB>
+                  </a:tcPr>
+                </a:tc>
+                <a:tc>
+                  <a:txBody>
+                    <a:bodyPr/>
+                    <a:lstStyle/>
+                    <a:p>
+                      <a:r>
+                        <a:rPr sz="1300" b="0">
+                          <a:solidFill>
+                            <a:srgbClr val="5E5E5E"/>
+                          </a:solidFill>
+                          <a:latin typeface="Pretendard Medium"/>
+                        </a:rPr>
+                        <a:t>ko/ch10_dispatch.md</a:t>
+                      </a:r>
+                    </a:p>
+                  </a:txBody>
+                  <a:tcPr marL="101600" marR="101600" marT="101600" marB="101600" anchor="ctr">
+                    <a:solidFill>
+                      <a:srgbClr val="FFFFFF"/>
+                    </a:solidFill>
+                    <a:lnL w="0">
+                      <a:noFill/>
+                    </a:lnL>
+                    <a:lnR w="0">
+                      <a:noFill/>
+                    </a:lnR>
+                    <a:lnT w="0">
+                      <a:noFill/>
+                    </a:lnT>
+                    <a:lnB w="9525">
+                      <a:solidFill>
+                        <a:srgbClr val="E2E2E2"/>
+                      </a:solidFill>
+                    </a:lnB>
+                  </a:tcPr>
+                </a:tc>
+              </a:tr>
+              <a:tr h="635000">
+                <a:tc>
+                  <a:txBody>
+                    <a:bodyPr/>
+                    <a:lstStyle/>
+                    <a:p>
+                      <a:r>
+                        <a:rPr sz="1300" b="1">
+                          <a:solidFill>
+                            <a:srgbClr val="000000"/>
+                          </a:solidFill>
+                          <a:latin typeface="Pretendard"/>
+                        </a:rPr>
+                        <a:t>실습 노트북</a:t>
+                      </a:r>
+                    </a:p>
+                  </a:txBody>
+                  <a:tcPr marL="101600" marR="101600" marT="101600" marB="101600" anchor="ctr">
+                    <a:solidFill>
+                      <a:srgbClr val="FFFFFF"/>
+                    </a:solidFill>
+                    <a:lnL w="0">
+                      <a:noFill/>
+                    </a:lnL>
+                    <a:lnR w="0">
+                      <a:noFill/>
+                    </a:lnR>
+                    <a:lnT w="0">
+                      <a:noFill/>
+                    </a:lnT>
+                    <a:lnB w="9525">
+                      <a:solidFill>
+                        <a:srgbClr val="E2E2E2"/>
+                      </a:solidFill>
+                    </a:lnB>
+                  </a:tcPr>
+                </a:tc>
+                <a:tc>
+                  <a:txBody>
+                    <a:bodyPr/>
+                    <a:lstStyle/>
+                    <a:p>
+                      <a:r>
+                        <a:rPr sz="1300" b="0">
+                          <a:solidFill>
+                            <a:srgbClr val="5E5E5E"/>
+                          </a:solidFill>
+                          <a:latin typeface="Pretendard Medium"/>
+                        </a:rPr>
+                        <a:t>labs/ch10_dispatch.ipynb</a:t>
+                      </a:r>
+                    </a:p>
+                  </a:txBody>
+                  <a:tcPr marL="101600" marR="101600" marT="101600" marB="101600" anchor="ctr">
+                    <a:solidFill>
+                      <a:srgbClr val="FFFFFF"/>
+                    </a:solidFill>
+                    <a:lnL w="0">
+                      <a:noFill/>
+                    </a:lnL>
+                    <a:lnR w="0">
+                      <a:noFill/>
+                    </a:lnR>
+                    <a:lnT w="0">
+                      <a:noFill/>
+                    </a:lnT>
+                    <a:lnB w="9525">
+                      <a:solidFill>
+                        <a:srgbClr val="E2E2E2"/>
+                      </a:solidFill>
+                    </a:lnB>
+                  </a:tcPr>
+                </a:tc>
+              </a:tr>
+            </a:tbl>
+          </a:graphicData>
+        </a:graphic>
+      </p:graphicFrame>
+      <p:sp>
+        <p:nvSpPr>
+          <p:cNvPr id="25" name="Slide Number Placeholder 0"/>
+          <p:cNvSpPr>
+            <a:spLocks noGrp="1"/>
+          </p:cNvSpPr>
+          <p:nvPr>
+            <p:ph type="sldNum" sz="quarter" idx="4294967295"/>
+          </p:nvPr>
+        </p:nvSpPr>
+        <p:spPr>
+          <a:xfrm>
+            <a:off x="10591495" y="6355080"/>
+            <a:ext cx="914400" cy="274320"/>
+          </a:xfrm>
+          <a:prstGeom prst="rect">
+            <a:avLst/>
+          </a:prstGeom>
+          <a:extLst>
+            <a:ext uri="{C572A759-6A51-4108-AA02-DFA0A04FC94B}">
+              <ma14:wrappingTextBoxFlag xmlns:ma14="http://schemas.microsoft.com/office/mac/drawingml/2011/main" val="0"/>
+            </a:ext>
+          </a:extLst>
+        </p:spPr>
+        <p:txBody>
+          <a:bodyPr/>
+          <a:lstStyle>
+            <a:lvl1pPr>
+              <a:defRPr sz="1000">
                 <a:solidFill>
                   <a:srgbClr val="AFAFAF"/>
                 </a:solidFill>
-              </a:rPr>
-              <a:t>2.1  </a:t>
-            </a:r>
-            <a:r>
-              <a:t>비용행렬</a:t>
-            </a:r>
-          </a:p>
-          <a:p>
-            <a:pPr>
-              <a:spcAft>
-                <a:spcPts val="1000"/>
-              </a:spcAft>
-            </a:pPr>
-            <a:r>
-              <a:rPr>
-                <a:solidFill>
-                  <a:srgbClr val="AFAFAF"/>
-                </a:solidFill>
-              </a:rPr>
-              <a:t>2.2  </a:t>
-            </a:r>
-            <a:r>
-              <a:t>탐욕 배차</a:t>
-            </a:r>
-          </a:p>
-          <a:p>
-            <a:pPr>
-              <a:spcAft>
-                <a:spcPts val="1000"/>
-              </a:spcAft>
-            </a:pPr>
-            <a:r>
-              <a:rPr>
-                <a:solidFill>
-                  <a:srgbClr val="AFAFAF"/>
-                </a:solidFill>
-              </a:rPr>
-              <a:t>2.3  </a:t>
-            </a:r>
-            <a:r>
-              <a:t>할당 문제</a:t>
-            </a:r>
+                <a:latin typeface="Pretendard Medium"/>
+                <a:ea typeface="Pretendard Medium"/>
+                <a:cs typeface="Pretendard Medium"/>
+              </a:defRPr>
+            </a:lvl1pPr>
+          </a:lstStyle>
+          <a:p>
+            <a:pPr algn="r"/>
+            <a:fld id="{F7021451-1387-4CA6-816F-3879F97B5CBC}" type="slidenum">
+              <a:rPr b="0" lang="en-US"/>
+              <a:t>1008</a:t>
+            </a:fld>
+            <a:endParaRPr lang="en-US"/>
           </a:p>
         </p:txBody>
       </p:sp>
@@ -9228,12 +9742,12 @@
       <p:grpSpPr/>
       <p:sp>
         <p:nvSpPr>
-          <p:cNvPr id="2" name="Title 1"/>
-          <p:cNvSpPr>
-            <a:spLocks noGrp="1"/>
-          </p:cNvSpPr>
-          <p:nvPr>
-            <p:ph type="title" idx="100"/>
+          <p:cNvPr id="2" name="Text Placeholder 1"/>
+          <p:cNvSpPr>
+            <a:spLocks noGrp="1"/>
+          </p:cNvSpPr>
+          <p:nvPr>
+            <p:ph type="body" idx="100"/>
           </p:nvPr>
         </p:nvSpPr>
         <p:spPr/>
@@ -9242,19 +9756,19 @@
           <a:lstStyle/>
           <a:p>
             <a:r>
-              <a:t>2.1 비용행렬</a:t>
-            </a:r>
-          </a:p>
-        </p:txBody>
-      </p:sp>
-      <p:sp>
-        <p:nvSpPr>
-          <p:cNvPr id="3" name="Text Placeholder 2"/>
-          <p:cNvSpPr>
-            <a:spLocks noGrp="1"/>
-          </p:cNvSpPr>
-          <p:nvPr>
-            <p:ph type="body" idx="101"/>
+              <a:t>02</a:t>
+            </a:r>
+          </a:p>
+        </p:txBody>
+      </p:sp>
+      <p:sp>
+        <p:nvSpPr>
+          <p:cNvPr id="3" name="Title 2"/>
+          <p:cNvSpPr>
+            <a:spLocks noGrp="1"/>
+          </p:cNvSpPr>
+          <p:nvPr>
+            <p:ph type="title" idx="101"/>
           </p:nvPr>
         </p:nvSpPr>
         <p:spPr/>
@@ -9263,7 +9777,7 @@
           <a:lstStyle/>
           <a:p>
             <a:r>
-              <a:t>2. 교재 10.1–10.3 비용행렬과 두 해법</a:t>
+              <a:t>교재 10.1–10.3 비용행렬과 두 해법</a:t>
             </a:r>
           </a:p>
         </p:txBody>
@@ -9283,76 +9797,58 @@
           <a:bodyPr/>
           <a:lstStyle/>
           <a:p>
-            <a:pPr/>
-            <a:r>
-              <a:t>행은 승객, 열은 차량, 칸은 그 차량이 그 승객에게 도달하는 시간</a:t>
-            </a:r>
-          </a:p>
-          <a:p>
-            <a:pPr/>
-            <a:r>
-              <a:t>예시 상황: 승객 0과 승객 1의 최근접 차량이 모두 차량 0</a:t>
-            </a:r>
-          </a:p>
-          <a:p>
-            <a:pPr/>
-            <a:r>
-              <a:t>배차 결정 = 행렬에서 행마다 열 하나를 고르되 열 중복 없이</a:t>
-            </a:r>
-          </a:p>
-          <a:p>
-            <a:pPr/>
-            <a:r>
-              <a:t>목적함수: 선택한 칸의 합을 최소화</a:t>
-            </a:r>
-          </a:p>
-        </p:txBody>
-      </p:sp>
-      <p:sp>
-        <p:nvSpPr>
-          <p:cNvPr id="25" name="Slide Number Placeholder 0"/>
-          <p:cNvSpPr>
-            <a:spLocks noGrp="1"/>
-          </p:cNvSpPr>
-          <p:nvPr>
-            <p:ph type="sldNum" sz="quarter" idx="4294967295"/>
-          </p:nvPr>
-        </p:nvSpPr>
-        <p:spPr>
-          <a:xfrm>
-            <a:off x="10591495" y="6355080"/>
-            <a:ext cx="914400" cy="274320"/>
-          </a:xfrm>
-          <a:prstGeom prst="rect">
-            <a:avLst/>
-          </a:prstGeom>
-          <a:extLst>
-            <a:ext uri="{C572A759-6A51-4108-AA02-DFA0A04FC94B}">
-              <ma14:wrappingTextBoxFlag xmlns:ma14="http://schemas.microsoft.com/office/mac/drawingml/2011/main" val="0"/>
-            </a:ext>
-          </a:extLst>
-        </p:spPr>
-        <p:txBody>
-          <a:bodyPr/>
-          <a:lstStyle>
-            <a:lvl1pPr>
-              <a:defRPr sz="1000">
+            <a:pPr>
+              <a:spcAft>
+                <a:spcPts val="1000"/>
+              </a:spcAft>
+            </a:pPr>
+            <a:r>
+              <a:rPr>
                 <a:solidFill>
                   <a:srgbClr val="AFAFAF"/>
                 </a:solidFill>
-                <a:latin typeface="Pretendard Medium"/>
-                <a:ea typeface="Pretendard Medium"/>
-                <a:cs typeface="Pretendard Medium"/>
-              </a:defRPr>
-            </a:lvl1pPr>
-          </a:lstStyle>
-          <a:p>
-            <a:pPr algn="r"/>
-            <a:fld id="{F7021451-1387-4CA6-816F-3879F97B5CBC}" type="slidenum">
-              <a:rPr b="0" lang="en-US"/>
-              <a:t>1004</a:t>
-            </a:fld>
-            <a:endParaRPr lang="en-US"/>
+              </a:rPr>
+              <a:t>2.1  </a:t>
+            </a:r>
+            <a:r>
+              <a:t>비용행렬</a:t>
+            </a:r>
+          </a:p>
+          <a:p>
+            <a:pPr>
+              <a:spcAft>
+                <a:spcPts val="1000"/>
+              </a:spcAft>
+            </a:pPr>
+            <a:r>
+              <a:rPr>
+                <a:solidFill>
+                  <a:srgbClr val="AFAFAF"/>
+                </a:solidFill>
+              </a:rPr>
+              <a:t>2.2  </a:t>
+            </a:r>
+            <a:r>
+              <a:t>탐욕 배차</a:t>
+            </a:r>
+          </a:p>
+          <a:p>
+            <a:pPr>
+              <a:spcAft>
+                <a:spcPts val="1000"/>
+              </a:spcAft>
+            </a:pPr>
+            <a:r>
+              <a:rPr>
+                <a:solidFill>
+                  <a:srgbClr val="AFAFAF"/>
+                </a:solidFill>
+              </a:rPr>
+              <a:t>2.3  </a:t>
+            </a:r>
+            <a:r>
+              <a:t>할당 문제</a:t>
+            </a:r>
           </a:p>
         </p:txBody>
       </p:sp>
@@ -9390,7 +9886,7 @@
           <a:lstStyle/>
           <a:p>
             <a:r>
-              <a:t>2.2 탐욕 배차</a:t>
+              <a:t>2.1 비용행렬</a:t>
             </a:r>
           </a:p>
         </p:txBody>
@@ -9433,25 +9929,25 @@
           <a:p>
             <a:pPr/>
             <a:r>
-              <a:t>규칙: 호출 순서대로 남은 차량 중 최근접 차량 배정</a:t>
+              <a:t>행은 승객, 열은 차량, 칸은 그 차량이 그 승객에게 도달하는 시간</a:t>
             </a:r>
           </a:p>
           <a:p>
             <a:pPr/>
             <a:r>
-              <a:t>승객 0이 차량 0을 배정받고, 승객 1은 차선을 배정받음</a:t>
+              <a:t>예시 상황: 승객 0과 승객 1의 최근접 차량이 모두 차량 0</a:t>
             </a:r>
           </a:p>
           <a:p>
             <a:pPr/>
             <a:r>
-              <a:t>겉보기 공정성: 먼저 호출한 사람이 먼저 배정</a:t>
+              <a:t>배차 결정 = 행렬에서 행마다 열 하나를 고르되 열 중복 없이</a:t>
             </a:r>
           </a:p>
           <a:p>
             <a:pPr/>
             <a:r>
-              <a:t>한계: 전체 대기시간의 합에서는 더 나은 배치가 존재</a:t>
+              <a:t>목적함수: 선택한 칸의 합을 최소화</a:t>
             </a:r>
           </a:p>
         </p:txBody>
@@ -9538,7 +10034,7 @@
           <a:lstStyle/>
           <a:p>
             <a:r>
-              <a:t>2.3 할당 문제</a:t>
+              <a:t>2.2 탐욕 배차</a:t>
             </a:r>
           </a:p>
         </p:txBody>
@@ -9581,25 +10077,25 @@
           <a:p>
             <a:pPr/>
             <a:r>
-              <a:t>전수 탐색은 승객 3명이면 6가지로 가능</a:t>
+              <a:t>규칙: 호출 순서대로 남은 차량 중 최근접 차량 배정</a:t>
             </a:r>
           </a:p>
           <a:p>
             <a:pPr/>
             <a:r>
-              <a:t>승객 20명이면 20 팩토리얼 — 약 243경 가지로 불가능</a:t>
+              <a:t>승객 0이 차량 0을 배정받고, 승객 1은 차선을 배정받음</a:t>
             </a:r>
           </a:p>
           <a:p>
             <a:pPr/>
             <a:r>
-              <a:t>이 문제의 이름은 할당 문제, 헝가리안 알고리즘으로 다항 시간에 해결</a:t>
+              <a:t>겉보기 공정성: 먼저 호출한 사람이 먼저 배정</a:t>
             </a:r>
           </a:p>
           <a:p>
             <a:pPr/>
             <a:r>
-              <a:t>구현은 scipy 제공 — 직접 작성하지 않음</a:t>
+              <a:t>한계: 전체 대기시간의 합에서는 더 나은 배치가 존재</a:t>
             </a:r>
           </a:p>
         </p:txBody>
